--- a/decks/combined-cells/combined-cells_ch6_osmosis-and-active-transport.pptx
+++ b/decks/combined-cells/combined-cells_ch6_osmosis-and-active-transport.pptx
@@ -124,30 +124,30 @@
   <p:extLst>
     <p:ext uri="{521415D9-36F7-43E2-AB2F-B90AF26B5E84}">
       <p14:sectionLst xmlns:p14="http://schemas.microsoft.com/office/powerpoint/2010/main">
-        <p14:section name="Opening" id="{ef5d3dc9-490e-32f0-c9c1-3892795c622a}">
+        <p14:section name="Opening" id="{35d867ea-6a38-9b9a-533a-913724402736}">
           <p14:sldIdLst>
             <p14:sldId id="256"/>
           </p14:sldIdLst>
         </p14:section>
-        <p14:section name="Gate" id="{ad183361-e079-3367-7e76-fc62b002ac2e}">
+        <p14:section name="Gate" id="{050b8cec-ef78-0012-7bad-201ee711ee2c}">
           <p14:sldIdLst>
             <p14:sldId id="257"/>
             <p14:sldId id="258"/>
           </p14:sldIdLst>
         </p14:section>
-        <p14:section name="Pre-teach" id="{b9b31309-7d74-095e-f864-8e3bd1400f0f}">
+        <p14:section name="Pre-teach" id="{b79373a0-24ef-0ffe-b368-e4d0aeb98dd1}">
           <p14:sldIdLst>
             <p14:sldId id="259"/>
             <p14:sldId id="260"/>
           </p14:sldIdLst>
         </p14:section>
-        <p14:section name="Read-along" id="{ccd4d96e-1a6c-9c72-be33-c8e3c94c199b}">
+        <p14:section name="Read-along" id="{6e4ebfab-8c67-3235-6fbe-3aaa2c182735}">
           <p14:sldIdLst>
             <p14:sldId id="261"/>
             <p14:sldId id="262"/>
           </p14:sldIdLst>
         </p14:section>
-        <p14:section name="Teach" id="{905bb590-b706-94ca-0c88-0f53fdfecd41}">
+        <p14:section name="Teach" id="{23723b39-adc3-e562-929c-862bf82b234a}">
           <p14:sldIdLst>
             <p14:sldId id="263"/>
             <p14:sldId id="264"/>
@@ -155,19 +155,19 @@
             <p14:sldId id="266"/>
           </p14:sldIdLst>
         </p14:section>
-        <p14:section name="Routes" id="{7de8cf4a-5746-32f5-1b6c-a94c1d07153e}">
+        <p14:section name="Routes" id="{e5452645-0f47-bf68-5112-03892bca913a}">
           <p14:sldIdLst>
             <p14:sldId id="267"/>
             <p14:sldId id="268"/>
             <p14:sldId id="269"/>
           </p14:sldIdLst>
         </p14:section>
-        <p14:section name="Close" id="{252ba891-64f0-0f01-0e9c-e0835b5836ab}">
+        <p14:section name="Close" id="{1f7c8624-13d0-e86d-6367-6debc60caabf}">
           <p14:sldIdLst>
             <p14:sldId id="270"/>
           </p14:sldIdLst>
         </p14:section>
-        <p14:section name="Answers" id="{c5f2c6a5-1b2d-e474-730a-2b24aad4e44c}">
+        <p14:section name="Answers" id="{45c51029-3235-507e-e191-5887e31b4b58}">
           <p14:sldIdLst>
             <p14:sldId id="271"/>
             <p14:sldId id="272"/>
@@ -1138,7 +1138,7 @@
               <a:rPr lang="en-US" dirty="0"/>
               <a:t>Exit ticket — individual, silent, on a slip or mini-whiteboard. Recall before help: no notes, no lanes, no hints. Collect before pupils leave.
 Question: In osmosis, which substance moves across the partially permeable membrane?
-Answer: D   water. Osmosis is the movement of water, and only water, through a partially permeable membrane from a dilute to a concentrated solution.
+Answer: C   water. Osmosis is the movement of water, and only water, through a partially permeable membrane from a dilute to a concentrated solution.
 Source of this question: gate item 1 re-asked (options rotated) — this chapter has no third quick-check module.
 The ebook also holds task 3, "Water and minerals into a root", for homework or the next lesson's do now.
 Sort the slips: correct → ready to move on; incorrect → start next lesson in the pre-teach group, with the read-along and the Support lane. Same destination next time.</a:t>
@@ -1321,7 +1321,7 @@
             <a:r>
               <a:rPr lang="en-US" dirty="0"/>
               <a:t>Answers — task 2: Cell in pure water. Reveal the answer; pupils mark their own work in a different colour, then read the "why" together. Same destination for every lane, so one answer serves the whole class.
-Answer: A   Water moves in by osmosis; the cell swells and bursts
+Answer: D   Water moves in by osmosis; the cell swells and bursts
 Why: Water moves by osmosis from the dilute water into the more concentrated cell; an animal cell has no wall to stop it swelling, so it bursts.
 Ask a Support pupil to explain one step, and a Stretch pupil to share their extension.</a:t>
             </a:r>
@@ -1412,7 +1412,7 @@
             <a:r>
               <a:rPr lang="en-US" dirty="0"/>
               <a:t>Answers — exit ticket: Exit ticket. Reveal the answer; pupils mark their own work in a different colour, then read the "why" together. Same destination for every lane, so one answer serves the whole class.
-Answer: D   water
+Answer: C   water
 Why: Osmosis is the movement of water, and only water, through a partially permeable membrane from a dilute to a concentrated solution.
 Ask a Support pupil to explain one step, and a Stretch pupil to share their extension.</a:t>
             </a:r>
@@ -1503,7 +1503,7 @@
             <a:r>
               <a:rPr lang="en-US" dirty="0"/>
               <a:t>Do now — retrieval. Silent, no notes, no help: recall comes before any support. Give about four minutes.
-1. In osmosis, which substance moves across the partially permeable membrane?  →  A   water
+1. In osmosis, which substance moves across the partially permeable membrane?  →  D   water
 2. Active transport needs ___ from respiration.  →  energy
 3. A potato cylinder has a mass of 2.0 g at the start and 2.3 g at the end of the experiment. Calculate the percentage change in mass.  →  15 %
 Circulate: who gets 3/3 (Stretch route), 2/3 (Core), 0–1 (Support)? Use this to route pupils later in the lesson.</a:t>
@@ -1595,7 +1595,7 @@
             <a:r>
               <a:rPr lang="en-US" dirty="0"/>
               <a:t>Answers — pupils mark their own in a different colour, then hands up for 3/3, 2/3, 1/3.
-1. A   water. Osmosis is the movement of water, and only water, through a partially permeable membrane from a dilute to a concentrated solution.
+1. D   water. Osmosis is the movement of water, and only water, through a partially permeable membrane from a dilute to a concentrated solution.
 2. energy. Active transport moves particles against the gradient, which cannot happen on its own; the energy comes from respiration, which is why root hair cells have many mitochondria.
 3. 15 %. Change = 2.3 − 2.0 = 0.3 g; 0.3 ÷ 2.0 × 100 = 15 % (exact). A positive change: water moved in.
 Say the route each score points to: 3/3 Stretch, 2/3 Core, 0–1 Support. Pupils may choose to move up.</a:t>
@@ -6832,7 +6832,7 @@
                 <a:ea typeface="Calibri" pitchFamily="34" charset="-122"/>
                 <a:cs typeface="Calibri" pitchFamily="34" charset="-120"/>
               </a:rPr>
-              <a:t>Water moves in by osmosis; the cell swells and bursts</a:t>
+              <a:t>Water moves in by active transport; the cell swells</a:t>
             </a:r>
             <a:endParaRPr lang="en-US" sz="2600" dirty="0"/>
           </a:p>
@@ -6943,7 +6943,7 @@
                 <a:ea typeface="Calibri" pitchFamily="34" charset="-122"/>
                 <a:cs typeface="Calibri" pitchFamily="34" charset="-120"/>
               </a:rPr>
-              <a:t>Water moves in by active transport; the cell swells</a:t>
+              <a:t>Water moves in by osmosis; the cell swells and bursts</a:t>
             </a:r>
             <a:endParaRPr lang="en-US" sz="2600" dirty="0"/>
           </a:p>
@@ -8310,7 +8310,7 @@
                 <a:ea typeface="Calibri" pitchFamily="34" charset="-122"/>
                 <a:cs typeface="Calibri" pitchFamily="34" charset="-120"/>
               </a:rPr>
-              <a:t>sugar</a:t>
+              <a:t>oxygen</a:t>
             </a:r>
             <a:endParaRPr lang="en-US" sz="2400" dirty="0"/>
           </a:p>
@@ -8347,7 +8347,7 @@
                 <a:ea typeface="Calibri" pitchFamily="34" charset="-122"/>
                 <a:cs typeface="Calibri" pitchFamily="34" charset="-120"/>
               </a:rPr>
-              <a:t>salt</a:t>
+              <a:t>sugar</a:t>
             </a:r>
             <a:endParaRPr lang="en-US" sz="2400" dirty="0"/>
           </a:p>
@@ -8384,7 +8384,7 @@
                 <a:ea typeface="Calibri" pitchFamily="34" charset="-122"/>
                 <a:cs typeface="Calibri" pitchFamily="34" charset="-120"/>
               </a:rPr>
-              <a:t>oxygen</a:t>
+              <a:t>water</a:t>
             </a:r>
             <a:endParaRPr lang="en-US" sz="2400" dirty="0"/>
           </a:p>
@@ -8421,7 +8421,7 @@
                 <a:ea typeface="Calibri" pitchFamily="34" charset="-122"/>
                 <a:cs typeface="Calibri" pitchFamily="34" charset="-120"/>
               </a:rPr>
-              <a:t>water</a:t>
+              <a:t>salt</a:t>
             </a:r>
             <a:endParaRPr lang="en-US" sz="2400" dirty="0"/>
           </a:p>
@@ -9285,7 +9285,7 @@
                 <a:ea typeface="Cambria" pitchFamily="34" charset="-122"/>
                 <a:cs typeface="Cambria" pitchFamily="34" charset="-120"/>
               </a:rPr>
-              <a:t>A   Water moves in by osmosis; the cell swells and bursts</a:t>
+              <a:t>D   Water moves in by osmosis; the cell swells and bursts</a:t>
             </a:r>
             <a:endParaRPr lang="en-US" sz="1800" dirty="0"/>
           </a:p>
@@ -9744,7 +9744,7 @@
                 <a:ea typeface="Cambria" pitchFamily="34" charset="-122"/>
                 <a:cs typeface="Cambria" pitchFamily="34" charset="-120"/>
               </a:rPr>
-              <a:t>D   water</a:t>
+              <a:t>C   water</a:t>
             </a:r>
             <a:endParaRPr lang="en-US" sz="1800" dirty="0"/>
           </a:p>
@@ -10278,7 +10278,7 @@
                 <a:ea typeface="Calibri" pitchFamily="34" charset="-122"/>
                 <a:cs typeface="Calibri" pitchFamily="34" charset="-120"/>
               </a:rPr>
-              <a:t>water</a:t>
+              <a:t>salt</a:t>
             </a:r>
             <a:endParaRPr lang="en-US" sz="2200" dirty="0"/>
           </a:p>
@@ -10315,7 +10315,7 @@
                 <a:ea typeface="Calibri" pitchFamily="34" charset="-122"/>
                 <a:cs typeface="Calibri" pitchFamily="34" charset="-120"/>
               </a:rPr>
-              <a:t>sugar</a:t>
+              <a:t>oxygen</a:t>
             </a:r>
             <a:endParaRPr lang="en-US" sz="2200" dirty="0"/>
           </a:p>
@@ -10352,7 +10352,7 @@
                 <a:ea typeface="Calibri" pitchFamily="34" charset="-122"/>
                 <a:cs typeface="Calibri" pitchFamily="34" charset="-120"/>
               </a:rPr>
-              <a:t>salt</a:t>
+              <a:t>sugar</a:t>
             </a:r>
             <a:endParaRPr lang="en-US" sz="2200" dirty="0"/>
           </a:p>
@@ -10389,7 +10389,7 @@
                 <a:ea typeface="Calibri" pitchFamily="34" charset="-122"/>
                 <a:cs typeface="Calibri" pitchFamily="34" charset="-120"/>
               </a:rPr>
-              <a:t>oxygen</a:t>
+              <a:t>water</a:t>
             </a:r>
             <a:endParaRPr lang="en-US" sz="2200" dirty="0"/>
           </a:p>
@@ -11186,7 +11186,7 @@
                 <a:ea typeface="Calibri" pitchFamily="34" charset="-122"/>
                 <a:cs typeface="Calibri" pitchFamily="34" charset="-120"/>
               </a:rPr>
-              <a:t>A   water</a:t>
+              <a:t>D   water</a:t>
             </a:r>
             <a:endParaRPr lang="en-US" sz="2200" dirty="0"/>
           </a:p>

--- a/decks/combined-cells/combined-cells_ch6_osmosis-and-active-transport.pptx
+++ b/decks/combined-cells/combined-cells_ch6_osmosis-and-active-transport.pptx
@@ -124,30 +124,30 @@
   <p:extLst>
     <p:ext uri="{521415D9-36F7-43E2-AB2F-B90AF26B5E84}">
       <p14:sectionLst xmlns:p14="http://schemas.microsoft.com/office/powerpoint/2010/main">
-        <p14:section name="Opening" id="{35d867ea-6a38-9b9a-533a-913724402736}">
+        <p14:section name="Opening" id="{5264c963-2df3-4784-8b6a-c7eb62793ded}">
           <p14:sldIdLst>
             <p14:sldId id="256"/>
           </p14:sldIdLst>
         </p14:section>
-        <p14:section name="Gate" id="{050b8cec-ef78-0012-7bad-201ee711ee2c}">
+        <p14:section name="Gate" id="{088ffae7-96fc-decf-a354-9b8ae5956f3d}">
           <p14:sldIdLst>
             <p14:sldId id="257"/>
             <p14:sldId id="258"/>
           </p14:sldIdLst>
         </p14:section>
-        <p14:section name="Pre-teach" id="{b79373a0-24ef-0ffe-b368-e4d0aeb98dd1}">
+        <p14:section name="Pre-teach" id="{988b8766-3123-9ed0-a314-e2f4b7b6cf6e}">
           <p14:sldIdLst>
             <p14:sldId id="259"/>
             <p14:sldId id="260"/>
           </p14:sldIdLst>
         </p14:section>
-        <p14:section name="Read-along" id="{6e4ebfab-8c67-3235-6fbe-3aaa2c182735}">
+        <p14:section name="Read-along" id="{cba88024-b01b-faa7-0efb-46c5d7c63a2a}">
           <p14:sldIdLst>
             <p14:sldId id="261"/>
             <p14:sldId id="262"/>
           </p14:sldIdLst>
         </p14:section>
-        <p14:section name="Teach" id="{23723b39-adc3-e562-929c-862bf82b234a}">
+        <p14:section name="Teach" id="{8a35d1f8-876e-7491-f9d8-8a48a459750c}">
           <p14:sldIdLst>
             <p14:sldId id="263"/>
             <p14:sldId id="264"/>
@@ -155,19 +155,19 @@
             <p14:sldId id="266"/>
           </p14:sldIdLst>
         </p14:section>
-        <p14:section name="Routes" id="{e5452645-0f47-bf68-5112-03892bca913a}">
+        <p14:section name="Routes" id="{4727817e-d196-1d80-7c16-4985e10a7966}">
           <p14:sldIdLst>
             <p14:sldId id="267"/>
             <p14:sldId id="268"/>
             <p14:sldId id="269"/>
           </p14:sldIdLst>
         </p14:section>
-        <p14:section name="Close" id="{1f7c8624-13d0-e86d-6367-6debc60caabf}">
+        <p14:section name="Close" id="{de492708-8df8-4b5b-99d8-4248845cd5fa}">
           <p14:sldIdLst>
             <p14:sldId id="270"/>
           </p14:sldIdLst>
         </p14:section>
-        <p14:section name="Answers" id="{45c51029-3235-507e-e191-5887e31b4b58}">
+        <p14:section name="Answers" id="{86edb627-5acc-caed-1c4d-5a66ebef4980}">
           <p14:sldIdLst>
             <p14:sldId id="271"/>
             <p14:sldId id="272"/>
